--- a/output/LA_100M/Deck.pptx
+++ b/output/LA_100M/Deck.pptx
@@ -6721,7 +6721,7 @@
                   <a:srgbClr val="1B1F2A"/>
                 </a:solidFill>
               </a:rPr>
-              <a:t>If delivery payments arrive at handover the peak shortage is EGP 244 million; if sales slip 12 months with prices 10% lower it is EGP 849 million. Jalour will fund gaps above project cash.</a:t>
+              <a:t>If delivery payments arrive at handover the peak shortage is EGP 244 million; if sales slip 12 months with prices 10% lower it is EGP 849 million. Jalour will cover gaps above project cash from its cash reserves and cash from other projects it is constructing.</a:t>
             </a:r>
             <a:endParaRPr lang="en-US" sz="1300" dirty="0"/>
           </a:p>
@@ -7542,7 +7542,7 @@
                             <a:srgbClr val="1B1F2A"/>
                           </a:solidFill>
                         </a:rPr>
-                        <a:t>Yes: value moves with Mostakbal City prices (final list 1.48x launch)</a:t>
+                        <a:t>Yes: value moves with Mostakbal City prices (delivery list 1.48x launch)</a:t>
                       </a:r>
                       <a:endParaRPr lang="en-US" sz="1300" dirty="0"/>
                     </a:p>
@@ -9097,7 +9097,7 @@
                   <a:srgbClr val="1B1F2A"/>
                 </a:solidFill>
               </a:rPr>
-              <a:t>Sponsor funding undertaking for project funding gaps; no guarantee of return</a:t>
+              <a:t>Sponsor funding undertaking for project gaps from Jalour cash reserves and other projects' cash; no guarantee of return</a:t>
             </a:r>
             <a:endParaRPr lang="en-US" sz="1300" dirty="0"/>
           </a:p>
@@ -10984,7 +10984,7 @@
                   <a:srgbClr val="1B1F2A"/>
                 </a:solidFill>
               </a:rPr>
-              <a:t>Option A break-even: the units could be resold at 35% of the final list price before the ticket is lost.</a:t>
+              <a:t>Option A break-even: the units could be resold at 35% of the delivery list price before the ticket is lost.</a:t>
             </a:r>
             <a:endParaRPr lang="en-US" sz="1200" dirty="0"/>
           </a:p>
@@ -11523,7 +11523,7 @@
                             <a:srgbClr val="1B1F2A"/>
                           </a:solidFill>
                         </a:rPr>
-                        <a:t>Contractual milestone; Jalour funds any gap; stress case shown</a:t>
+                        <a:t>Contractual milestone; Jalour covers any gap from cash reserves and other projects' cash; stress case shown</a:t>
                       </a:r>
                       <a:endParaRPr lang="en-US" sz="1200" dirty="0"/>
                     </a:p>
@@ -16891,7 +16891,7 @@
                             <a:srgbClr val="1B1F2A"/>
                           </a:solidFill>
                         </a:rPr>
-                        <a:t>Launch EGP 160,000 per m2, rising to 240,000 at the final list</a:t>
+                        <a:t>Launch EGP 160,000 per m2, rising to 240,000 at the delivery list</a:t>
                       </a:r>
                       <a:endParaRPr lang="en-US" sz="1200" dirty="0"/>
                     </a:p>
@@ -17261,7 +17261,7 @@
                             <a:srgbClr val="1B1F2A"/>
                           </a:solidFill>
                         </a:rPr>
-                        <a:t>Launch to final list: +44% retail, +50% offices over the sales window</a:t>
+                        <a:t>Launch to delivery list: +44% retail, +50% offices; offices +112% on today's asking, about 18% a year</a:t>
                       </a:r>
                       <a:endParaRPr lang="en-US" sz="1200" dirty="0"/>
                     </a:p>
@@ -20200,7 +20200,7 @@
                   <a:srgbClr val="1B1F2A"/>
                 </a:solidFill>
               </a:rPr>
-              <a:t>Funds project funding gaps from sponsor equity or other capital sources (to be documented)</a:t>
+              <a:t>Covers project funding gaps from its cash reserves and cash from other projects it is constructing (to be documented)</a:t>
             </a:r>
             <a:endParaRPr lang="en-US" sz="1400" dirty="0"/>
           </a:p>
@@ -20301,7 +20301,7 @@
                   <a:srgbClr val="1B1F2A"/>
                 </a:solidFill>
               </a:rPr>
-              <a:t>[To be provided by Jalour: completed projects, area delivered and units handed over]</a:t>
+              <a:t>Completed projects, area delivered and units handed over</a:t>
             </a:r>
             <a:endParaRPr lang="en-US" sz="1400" dirty="0"/>
           </a:p>
@@ -20319,7 +20319,7 @@
                   <a:srgbClr val="1B1F2A"/>
                 </a:solidFill>
               </a:rPr>
-              <a:t>[To be provided by Jalour: management team biographies]</a:t>
+              <a:t>Management team biographies</a:t>
             </a:r>
             <a:endParaRPr lang="en-US" sz="1400" dirty="0"/>
           </a:p>
@@ -20337,7 +20337,7 @@
                   <a:srgbClr val="1B1F2A"/>
                 </a:solidFill>
               </a:rPr>
-              <a:t>[To be provided by Jalour: audited financial statements of Jalour and Al Jalal Holding]</a:t>
+              <a:t>Audited financial statements of Jalour and Al Jalal Holding</a:t>
             </a:r>
             <a:endParaRPr lang="en-US" sz="1400" dirty="0"/>
           </a:p>
@@ -20355,7 +20355,25 @@
                   <a:srgbClr val="1B1F2A"/>
                 </a:solidFill>
               </a:rPr>
-              <a:t>[To be provided by Jalour: references from landlords, contractors and buyers]</a:t>
+              <a:t>References from landlords, contractors and buyers</a:t>
+            </a:r>
+            <a:endParaRPr lang="en-US" sz="1400" dirty="0"/>
+          </a:p>
+          <a:p>
+            <a:pPr marL="342900" indent="-342900">
+              <a:spcAft>
+                <a:spcPts val="600"/>
+              </a:spcAft>
+              <a:buSzPct val="100000"/>
+              <a:buChar char="•"/>
+            </a:pPr>
+            <a:r>
+              <a:rPr lang="en-US" sz="1400" dirty="0">
+                <a:solidFill>
+                  <a:srgbClr val="1B1F2A"/>
+                </a:solidFill>
+              </a:rPr>
+              <a:t>All provided after the investor signs a non-disclosure agreement</a:t>
             </a:r>
             <a:endParaRPr lang="en-US" sz="1400" dirty="0"/>
           </a:p>
@@ -20391,7 +20409,7 @@
                   <a:srgbClr val="6B7280"/>
                 </a:solidFill>
               </a:rPr>
-              <a:t>Source: Jalour Developments is the real estate arm of Al Jalal Holding, Cairo. Placeholders in brackets are pending from Jalour.</a:t>
+              <a:t>Source: Jalour Developments is the real estate arm of Al Jalal Holding, Cairo. Sponsor materials are provided after the investor signs a non-disclosure agreement.</a:t>
             </a:r>
             <a:endParaRPr lang="en-US" sz="900" dirty="0"/>
           </a:p>
@@ -20689,7 +20707,7 @@
                             <a:srgbClr val="FFFFFF"/>
                           </a:solidFill>
                         </a:rPr>
-                        <a:t>Final</a:t>
+                        <a:t>Delivery list</a:t>
                       </a:r>
                       <a:endParaRPr lang="en-US" sz="1200" dirty="0"/>
                     </a:p>

--- a/output/LA_100M/Deck.pptx
+++ b/output/LA_100M/Deck.pptx
@@ -4667,6 +4667,42 @@
         </p:nvSpPr>
         <p:spPr>
           <a:xfrm>
+            <a:off x="731520" y="5074920"/>
+            <a:ext cx="10515600" cy="548640"/>
+          </a:xfrm>
+          <a:prstGeom prst="rect">
+            <a:avLst/>
+          </a:prstGeom>
+          <a:noFill/>
+          <a:ln/>
+        </p:spPr>
+        <p:txBody>
+          <a:bodyPr wrap="square" lIns="0" tIns="0" rIns="0" bIns="0" rtlCol="0" anchor="ctr"/>
+          <a:lstStyle/>
+          <a:p>
+            <a:pPr indent="0" marL="0">
+              <a:buNone/>
+            </a:pPr>
+            <a:r>
+              <a:rPr lang="en-US" sz="1300" b="1" dirty="0">
+                <a:solidFill>
+                  <a:srgbClr val="B8893B"/>
+                </a:solidFill>
+              </a:rPr>
+              <a:t>ALL INFORMATION IN THIS PRESENTATION IS CONFIDENTIAL AND SUBJECT TO THE NON-DISCLOSURE AGREEMENT. Do not copy, forward or disclose it.</a:t>
+            </a:r>
+            <a:endParaRPr lang="en-US" sz="1300" dirty="0"/>
+          </a:p>
+        </p:txBody>
+      </p:sp>
+      <p:sp>
+        <p:nvSpPr>
+          <p:cNvPr id="7" name="Text 5"/>
+          <p:cNvSpPr txBox="1"/>
+          <p:nvPr/>
+        </p:nvSpPr>
+        <p:spPr>
+          <a:xfrm>
             <a:off x="731520" y="5852160"/>
             <a:ext cx="10515600" cy="365760"/>
           </a:xfrm>
@@ -13861,7 +13897,7 @@
                   <a:srgbClr val="AAB2BD"/>
                 </a:solidFill>
               </a:rPr>
-              <a:t>Jalour may raise further capital at project or holding level, subject to the investor's stated rights. Projections are not guarantees. Strictly private and confidential.</a:t>
+              <a:t>Jalour may raise further capital at project or holding level, subject to the investor's stated rights. Projections are not guarantees. All information in this presentation and in the other documents of this pack is confidential and subject to the non-disclosure agreement.</a:t>
             </a:r>
             <a:endParaRPr lang="en-US" sz="1100" dirty="0"/>
           </a:p>

--- a/output/LA_100M/Deck.pptx
+++ b/output/LA_100M/Deck.pptx
@@ -672,7 +672,7 @@
                 </a:solidFill>
                 <a:latin typeface="Arial"/>
               </a:rPr>
-              <a:t>Sales value by quarter of sale (EGP million, 80% of units)</a:t>
+              <a:t>Sales value by quarter of sale (EGP million)</a:t>
             </a:r>
           </a:p>
         </c:rich>
@@ -739,40 +739,40 @@
                 <c:ptCount val="12"/>
                 <c:lvl>
                   <c:pt idx="0">
+                    <c:v>M3</c:v>
+                  </c:pt>
+                  <c:pt idx="1">
+                    <c:v>M6</c:v>
+                  </c:pt>
+                  <c:pt idx="2">
+                    <c:v>M9</c:v>
+                  </c:pt>
+                  <c:pt idx="3">
+                    <c:v>M12</c:v>
+                  </c:pt>
+                  <c:pt idx="4">
                     <c:v>M15</c:v>
                   </c:pt>
-                  <c:pt idx="1">
+                  <c:pt idx="5">
                     <c:v>M18</c:v>
                   </c:pt>
-                  <c:pt idx="2">
+                  <c:pt idx="6">
                     <c:v>M21</c:v>
                   </c:pt>
-                  <c:pt idx="3">
+                  <c:pt idx="7">
                     <c:v>M24</c:v>
                   </c:pt>
-                  <c:pt idx="4">
+                  <c:pt idx="8">
                     <c:v>M27</c:v>
                   </c:pt>
-                  <c:pt idx="5">
+                  <c:pt idx="9">
                     <c:v>M30</c:v>
                   </c:pt>
-                  <c:pt idx="6">
+                  <c:pt idx="10">
                     <c:v>M33</c:v>
                   </c:pt>
-                  <c:pt idx="7">
+                  <c:pt idx="11">
                     <c:v>M36</c:v>
-                  </c:pt>
-                  <c:pt idx="8">
-                    <c:v>M39</c:v>
-                  </c:pt>
-                  <c:pt idx="9">
-                    <c:v>M42</c:v>
-                  </c:pt>
-                  <c:pt idx="10">
-                    <c:v>M45</c:v>
-                  </c:pt>
-                  <c:pt idx="11">
-                    <c:v>M48</c:v>
                   </c:pt>
                 </c:lvl>
               </c:multiLvlStrCache>
@@ -876,40 +876,40 @@
                 <c:ptCount val="12"/>
                 <c:lvl>
                   <c:pt idx="0">
+                    <c:v>M3</c:v>
+                  </c:pt>
+                  <c:pt idx="1">
+                    <c:v>M6</c:v>
+                  </c:pt>
+                  <c:pt idx="2">
+                    <c:v>M9</c:v>
+                  </c:pt>
+                  <c:pt idx="3">
+                    <c:v>M12</c:v>
+                  </c:pt>
+                  <c:pt idx="4">
                     <c:v>M15</c:v>
                   </c:pt>
-                  <c:pt idx="1">
+                  <c:pt idx="5">
                     <c:v>M18</c:v>
                   </c:pt>
-                  <c:pt idx="2">
+                  <c:pt idx="6">
                     <c:v>M21</c:v>
                   </c:pt>
-                  <c:pt idx="3">
+                  <c:pt idx="7">
                     <c:v>M24</c:v>
                   </c:pt>
-                  <c:pt idx="4">
+                  <c:pt idx="8">
                     <c:v>M27</c:v>
                   </c:pt>
-                  <c:pt idx="5">
+                  <c:pt idx="9">
                     <c:v>M30</c:v>
                   </c:pt>
-                  <c:pt idx="6">
+                  <c:pt idx="10">
                     <c:v>M33</c:v>
                   </c:pt>
-                  <c:pt idx="7">
+                  <c:pt idx="11">
                     <c:v>M36</c:v>
-                  </c:pt>
-                  <c:pt idx="8">
-                    <c:v>M39</c:v>
-                  </c:pt>
-                  <c:pt idx="9">
-                    <c:v>M42</c:v>
-                  </c:pt>
-                  <c:pt idx="10">
-                    <c:v>M45</c:v>
-                  </c:pt>
-                  <c:pt idx="11">
-                    <c:v>M48</c:v>
                   </c:pt>
                 </c:lvl>
               </c:multiLvlStrCache>
@@ -1208,38 +1208,41 @@
           </c:dLbls>
           <c:cat>
             <c:multiLvlStrRef>
-              <c:f>Sheet1!$A$2:$A$11</c:f>
+              <c:f>Sheet1!$A$2:$A$12</c:f>
               <c:multiLvlStrCache>
-                <c:ptCount val="10"/>
+                <c:ptCount val="11"/>
                 <c:lvl>
                   <c:pt idx="0">
+                    <c:v>Pre-launch</c:v>
+                  </c:pt>
+                  <c:pt idx="1">
                     <c:v>Y1</c:v>
                   </c:pt>
-                  <c:pt idx="1">
+                  <c:pt idx="2">
                     <c:v>Y2</c:v>
                   </c:pt>
-                  <c:pt idx="2">
+                  <c:pt idx="3">
                     <c:v>Y3</c:v>
                   </c:pt>
-                  <c:pt idx="3">
+                  <c:pt idx="4">
                     <c:v>Y4</c:v>
                   </c:pt>
-                  <c:pt idx="4">
+                  <c:pt idx="5">
                     <c:v>Y5</c:v>
                   </c:pt>
-                  <c:pt idx="5">
+                  <c:pt idx="6">
                     <c:v>Y6</c:v>
                   </c:pt>
-                  <c:pt idx="6">
+                  <c:pt idx="7">
                     <c:v>Y7</c:v>
                   </c:pt>
-                  <c:pt idx="7">
+                  <c:pt idx="8">
                     <c:v>Y8</c:v>
                   </c:pt>
-                  <c:pt idx="8">
+                  <c:pt idx="9">
                     <c:v>Y9</c:v>
                   </c:pt>
-                  <c:pt idx="9">
+                  <c:pt idx="10">
                     <c:v>Y10</c:v>
                   </c:pt>
                 </c:lvl>
@@ -1248,10 +1251,10 @@
           </c:cat>
           <c:val>
             <c:numRef>
-              <c:f>Sheet1!$B$2:$B$11</c:f>
+              <c:f>Sheet1!$B$2:$B$12</c:f>
               <c:numCache>
                 <c:formatCode>General</c:formatCode>
-                <c:ptCount val="10"/>
+                <c:ptCount val="11"/>
                 <c:pt idx="0">
                   <c:v>0</c:v>
                 </c:pt>
@@ -1281,6 +1284,9 @@
                 </c:pt>
                 <c:pt idx="9">
                   <c:v>14.49252</c:v>
+                </c:pt>
+                <c:pt idx="10">
+                  <c:v>0</c:v>
                 </c:pt>
               </c:numCache>
             </c:numRef>
@@ -1333,38 +1339,41 @@
           </c:dLbls>
           <c:cat>
             <c:multiLvlStrRef>
-              <c:f>Sheet1!$A$2:$A$11</c:f>
+              <c:f>Sheet1!$A$2:$A$12</c:f>
               <c:multiLvlStrCache>
-                <c:ptCount val="10"/>
+                <c:ptCount val="11"/>
                 <c:lvl>
                   <c:pt idx="0">
+                    <c:v>Pre-launch</c:v>
+                  </c:pt>
+                  <c:pt idx="1">
                     <c:v>Y1</c:v>
                   </c:pt>
-                  <c:pt idx="1">
+                  <c:pt idx="2">
                     <c:v>Y2</c:v>
                   </c:pt>
-                  <c:pt idx="2">
+                  <c:pt idx="3">
                     <c:v>Y3</c:v>
                   </c:pt>
-                  <c:pt idx="3">
+                  <c:pt idx="4">
                     <c:v>Y4</c:v>
                   </c:pt>
-                  <c:pt idx="4">
+                  <c:pt idx="5">
                     <c:v>Y5</c:v>
                   </c:pt>
-                  <c:pt idx="5">
+                  <c:pt idx="6">
                     <c:v>Y6</c:v>
                   </c:pt>
-                  <c:pt idx="6">
+                  <c:pt idx="7">
                     <c:v>Y7</c:v>
                   </c:pt>
-                  <c:pt idx="7">
+                  <c:pt idx="8">
                     <c:v>Y8</c:v>
                   </c:pt>
-                  <c:pt idx="8">
+                  <c:pt idx="9">
                     <c:v>Y9</c:v>
                   </c:pt>
-                  <c:pt idx="9">
+                  <c:pt idx="10">
                     <c:v>Y10</c:v>
                   </c:pt>
                 </c:lvl>
@@ -1373,10 +1382,10 @@
           </c:cat>
           <c:val>
             <c:numRef>
-              <c:f>Sheet1!$C$2:$C$11</c:f>
+              <c:f>Sheet1!$C$2:$C$12</c:f>
               <c:numCache>
                 <c:formatCode>General</c:formatCode>
-                <c:ptCount val="10"/>
+                <c:ptCount val="11"/>
                 <c:pt idx="0">
                   <c:v>-85</c:v>
                 </c:pt>
@@ -1406,6 +1415,9 @@
                 </c:pt>
                 <c:pt idx="9">
                   <c:v>-6.34047750000001</c:v>
+                </c:pt>
+                <c:pt idx="10">
+                  <c:v>0</c:v>
                 </c:pt>
               </c:numCache>
             </c:numRef>
@@ -1458,38 +1470,41 @@
           </c:dLbls>
           <c:cat>
             <c:multiLvlStrRef>
-              <c:f>Sheet1!$A$2:$A$11</c:f>
+              <c:f>Sheet1!$A$2:$A$12</c:f>
               <c:multiLvlStrCache>
-                <c:ptCount val="10"/>
+                <c:ptCount val="11"/>
                 <c:lvl>
                   <c:pt idx="0">
+                    <c:v>Pre-launch</c:v>
+                  </c:pt>
+                  <c:pt idx="1">
                     <c:v>Y1</c:v>
                   </c:pt>
-                  <c:pt idx="1">
+                  <c:pt idx="2">
                     <c:v>Y2</c:v>
                   </c:pt>
-                  <c:pt idx="2">
+                  <c:pt idx="3">
                     <c:v>Y3</c:v>
                   </c:pt>
-                  <c:pt idx="3">
+                  <c:pt idx="4">
                     <c:v>Y4</c:v>
                   </c:pt>
-                  <c:pt idx="4">
+                  <c:pt idx="5">
                     <c:v>Y5</c:v>
                   </c:pt>
-                  <c:pt idx="5">
+                  <c:pt idx="6">
                     <c:v>Y6</c:v>
                   </c:pt>
-                  <c:pt idx="6">
+                  <c:pt idx="7">
                     <c:v>Y7</c:v>
                   </c:pt>
-                  <c:pt idx="7">
+                  <c:pt idx="8">
                     <c:v>Y8</c:v>
                   </c:pt>
-                  <c:pt idx="8">
+                  <c:pt idx="9">
                     <c:v>Y9</c:v>
                   </c:pt>
-                  <c:pt idx="9">
+                  <c:pt idx="10">
                     <c:v>Y10</c:v>
                   </c:pt>
                 </c:lvl>
@@ -1498,10 +1513,10 @@
           </c:cat>
           <c:val>
             <c:numRef>
-              <c:f>Sheet1!$D$2:$D$11</c:f>
+              <c:f>Sheet1!$D$2:$D$12</c:f>
               <c:numCache>
                 <c:formatCode>General</c:formatCode>
-                <c:ptCount val="10"/>
+                <c:ptCount val="11"/>
                 <c:pt idx="0">
                   <c:v>0</c:v>
                 </c:pt>
@@ -1530,6 +1545,9 @@
                   <c:v>0</c:v>
                 </c:pt>
                 <c:pt idx="9">
+                  <c:v>0</c:v>
+                </c:pt>
+                <c:pt idx="10">
                   <c:v>0</c:v>
                 </c:pt>
               </c:numCache>
@@ -1639,38 +1657,41 @@
           </c:marker>
           <c:cat>
             <c:multiLvlStrRef>
-              <c:f>Sheet1!$A$2:$A$11</c:f>
+              <c:f>Sheet1!$A$2:$A$12</c:f>
               <c:multiLvlStrCache>
-                <c:ptCount val="10"/>
+                <c:ptCount val="11"/>
                 <c:lvl>
                   <c:pt idx="0">
+                    <c:v>Pre-launch</c:v>
+                  </c:pt>
+                  <c:pt idx="1">
                     <c:v>Y1</c:v>
                   </c:pt>
-                  <c:pt idx="1">
+                  <c:pt idx="2">
                     <c:v>Y2</c:v>
                   </c:pt>
-                  <c:pt idx="2">
+                  <c:pt idx="3">
                     <c:v>Y3</c:v>
                   </c:pt>
-                  <c:pt idx="3">
+                  <c:pt idx="4">
                     <c:v>Y4</c:v>
                   </c:pt>
-                  <c:pt idx="4">
+                  <c:pt idx="5">
                     <c:v>Y5</c:v>
                   </c:pt>
-                  <c:pt idx="5">
+                  <c:pt idx="6">
                     <c:v>Y6</c:v>
                   </c:pt>
-                  <c:pt idx="6">
+                  <c:pt idx="7">
                     <c:v>Y7</c:v>
                   </c:pt>
-                  <c:pt idx="7">
+                  <c:pt idx="8">
                     <c:v>Y8</c:v>
                   </c:pt>
-                  <c:pt idx="8">
+                  <c:pt idx="9">
                     <c:v>Y9</c:v>
                   </c:pt>
-                  <c:pt idx="9">
+                  <c:pt idx="10">
                     <c:v>Y10</c:v>
                   </c:pt>
                 </c:lvl>
@@ -1679,10 +1700,10 @@
           </c:cat>
           <c:val>
             <c:numRef>
-              <c:f>Sheet1!$E$2:$E$11</c:f>
+              <c:f>Sheet1!$E$2:$E$12</c:f>
               <c:numCache>
                 <c:formatCode>General</c:formatCode>
-                <c:ptCount val="10"/>
+                <c:ptCount val="11"/>
                 <c:pt idx="0">
                   <c:v>-85</c:v>
                 </c:pt>
@@ -1711,6 +1732,9 @@
                   <c:v>587.1408868749996</c:v>
                 </c:pt>
                 <c:pt idx="9">
+                  <c:v>595.2929293749995</c:v>
+                </c:pt>
+                <c:pt idx="10">
                   <c:v>595.2929293749995</c:v>
                 </c:pt>
               </c:numCache>
@@ -4975,7 +4999,7 @@
                 <a:ea typeface="Cambria" pitchFamily="34" charset="-122"/>
                 <a:cs typeface="Cambria" pitchFamily="34" charset="-120"/>
               </a:rPr>
-              <a:t>308</a:t>
+              <a:t>351</a:t>
             </a:r>
             <a:endParaRPr lang="en-US" sz="3000" dirty="0"/>
           </a:p>
@@ -5113,7 +5137,7 @@
                   <a:srgbClr val="6B7280"/>
                 </a:solidFill>
               </a:rPr>
-              <a:t>Peak cumulative shortage, EGP million (month 30)</a:t>
+              <a:t>Peak cumulative shortage, EGP million (month 18)</a:t>
             </a:r>
             <a:endParaRPr lang="en-US" sz="1200" dirty="0"/>
           </a:p>
@@ -5149,7 +5173,7 @@
                   <a:srgbClr val="6B7280"/>
                 </a:solidFill>
               </a:rPr>
-              <a:t>Source: Jalour financial model; Financial Annex, Project_CF sheet. Project years: Y1 = months 1 to 12. Excludes the 20% of units retained by Jalour.</a:t>
+              <a:t>Source: Jalour financial model; Financial Annex, Project_CF sheet. Project years: Y1 = months 1 to 12; Pre-launch = before month 1.</a:t>
             </a:r>
             <a:endParaRPr lang="en-US" sz="900" dirty="0"/>
           </a:p>
@@ -7393,7 +7417,7 @@
                             <a:srgbClr val="1B1F2A"/>
                           </a:solidFill>
                         </a:rPr>
-                        <a:t>Allocation at signing; handover month 54; resale from month 57</a:t>
+                        <a:t>Allocation at signing; handover month 42; resale from month 45</a:t>
                       </a:r>
                       <a:endParaRPr lang="en-US" sz="1300" dirty="0"/>
                     </a:p>
@@ -7454,7 +7478,7 @@
                             <a:srgbClr val="1B1F2A"/>
                           </a:solidFill>
                         </a:rPr>
-                        <a:t>Grace 24 months; 12 quarterly instalments, months 39 to 72</a:t>
+                        <a:t>Grace 24 months; 12 quarterly instalments, months 27 to 60</a:t>
                       </a:r>
                       <a:endParaRPr lang="en-US" sz="1300" dirty="0"/>
                     </a:p>
@@ -8503,7 +8527,7 @@
                             <a:srgbClr val="1B1F2A"/>
                           </a:solidFill>
                         </a:rPr>
-                        <a:t>Month 60</a:t>
+                        <a:t>Month 48</a:t>
                       </a:r>
                       <a:endParaRPr lang="en-US" sz="1300" dirty="0"/>
                     </a:p>
@@ -8564,7 +8588,7 @@
                             <a:srgbClr val="1B1F2A"/>
                           </a:solidFill>
                         </a:rPr>
-                        <a:t>Month 54</a:t>
+                        <a:t>Month 42</a:t>
                       </a:r>
                       <a:endParaRPr lang="en-US" sz="1300" dirty="0"/>
                     </a:p>
@@ -9763,7 +9787,7 @@
                             <a:srgbClr val="1B1F2A"/>
                           </a:solidFill>
                         </a:rPr>
-                        <a:t>308</a:t>
+                        <a:t>351</a:t>
                       </a:r>
                       <a:endParaRPr lang="en-US" sz="1200" dirty="0"/>
                     </a:p>
@@ -9948,7 +9972,7 @@
                             <a:srgbClr val="1B1F2A"/>
                           </a:solidFill>
                         </a:rPr>
-                        <a:t>204</a:t>
+                        <a:t>232</a:t>
                       </a:r>
                       <a:endParaRPr lang="en-US" sz="1200" dirty="0"/>
                     </a:p>
@@ -10133,7 +10157,7 @@
                             <a:srgbClr val="1B1F2A"/>
                           </a:solidFill>
                         </a:rPr>
-                        <a:t>412</a:t>
+                        <a:t>469</a:t>
                       </a:r>
                       <a:endParaRPr lang="en-US" sz="1200" dirty="0"/>
                     </a:p>
@@ -10318,7 +10342,7 @@
                             <a:srgbClr val="1B1F2A"/>
                           </a:solidFill>
                         </a:rPr>
-                        <a:t>126</a:t>
+                        <a:t>143</a:t>
                       </a:r>
                       <a:endParaRPr lang="en-US" sz="1200" dirty="0"/>
                     </a:p>
@@ -10503,7 +10527,7 @@
                             <a:srgbClr val="1B1F2A"/>
                           </a:solidFill>
                         </a:rPr>
-                        <a:t>258</a:t>
+                        <a:t>294</a:t>
                       </a:r>
                       <a:endParaRPr lang="en-US" sz="1200" dirty="0"/>
                     </a:p>
@@ -10688,7 +10712,7 @@
                             <a:srgbClr val="1B1F2A"/>
                           </a:solidFill>
                         </a:rPr>
-                        <a:t>209</a:t>
+                        <a:t>239</a:t>
                       </a:r>
                       <a:endParaRPr lang="en-US" sz="1200" dirty="0"/>
                     </a:p>
@@ -10873,7 +10897,7 @@
                             <a:srgbClr val="1B1F2A"/>
                           </a:solidFill>
                         </a:rPr>
-                        <a:t>275</a:t>
+                        <a:t>313</a:t>
                       </a:r>
                       <a:endParaRPr lang="en-US" sz="1200" dirty="0"/>
                     </a:p>
@@ -12533,7 +12557,7 @@
         </p:nvSpPr>
         <p:spPr>
           <a:xfrm>
-            <a:off x="740664" y="3026664"/>
+            <a:off x="1218646" y="3026664"/>
             <a:ext cx="164592" cy="164592"/>
           </a:xfrm>
           <a:prstGeom prst="ellipse">
@@ -12558,7 +12582,7 @@
         </p:nvSpPr>
         <p:spPr>
           <a:xfrm>
-            <a:off x="45720" y="2103120"/>
+            <a:off x="523702" y="2103120"/>
             <a:ext cx="1554480" cy="822960"/>
           </a:xfrm>
           <a:prstGeom prst="rect">
@@ -12580,7 +12604,7 @@
                   <a:srgbClr val="1B1F2A"/>
                 </a:solidFill>
               </a:rPr>
-              <a:t>Model start</a:t>
+              <a:t>Funding</a:t>
             </a:r>
             <a:endParaRPr lang="en-US" sz="1100" dirty="0"/>
           </a:p>
@@ -12608,7 +12632,7 @@
         </p:nvSpPr>
         <p:spPr>
           <a:xfrm>
-            <a:off x="2563368" y="3026664"/>
+            <a:off x="1377973" y="3026664"/>
             <a:ext cx="164592" cy="164592"/>
           </a:xfrm>
           <a:prstGeom prst="ellipse">
@@ -12633,7 +12657,7 @@
         </p:nvSpPr>
         <p:spPr>
           <a:xfrm>
-            <a:off x="1868424" y="3337560"/>
+            <a:off x="683029" y="3337560"/>
             <a:ext cx="1554480" cy="822960"/>
           </a:xfrm>
           <a:prstGeom prst="rect">
@@ -12669,7 +12693,7 @@
                   <a:srgbClr val="1B1F2A"/>
                 </a:solidFill>
               </a:rPr>
-              <a:t>Month 13</a:t>
+              <a:t>Month 1</a:t>
             </a:r>
             <a:endParaRPr lang="en-US" sz="1100" dirty="0"/>
           </a:p>
@@ -12683,7 +12707,7 @@
         </p:nvSpPr>
         <p:spPr>
           <a:xfrm>
-            <a:off x="3404616" y="3026664"/>
+            <a:off x="2333937" y="3026664"/>
             <a:ext cx="164592" cy="164592"/>
           </a:xfrm>
           <a:prstGeom prst="ellipse">
@@ -12708,7 +12732,7 @@
         </p:nvSpPr>
         <p:spPr>
           <a:xfrm>
-            <a:off x="2709672" y="2103120"/>
+            <a:off x="1638993" y="2103120"/>
             <a:ext cx="1554480" cy="822960"/>
           </a:xfrm>
           <a:prstGeom prst="rect">
@@ -12744,7 +12768,7 @@
                   <a:srgbClr val="1B1F2A"/>
                 </a:solidFill>
               </a:rPr>
-              <a:t>Month 19</a:t>
+              <a:t>Month 7</a:t>
             </a:r>
             <a:endParaRPr lang="en-US" sz="1100" dirty="0"/>
           </a:p>
@@ -12758,7 +12782,7 @@
         </p:nvSpPr>
         <p:spPr>
           <a:xfrm>
-            <a:off x="5788152" y="3026664"/>
+            <a:off x="5042500" y="3026664"/>
             <a:ext cx="164592" cy="164592"/>
           </a:xfrm>
           <a:prstGeom prst="ellipse">
@@ -12783,7 +12807,7 @@
         </p:nvSpPr>
         <p:spPr>
           <a:xfrm>
-            <a:off x="5093208" y="3337560"/>
+            <a:off x="4347556" y="3337560"/>
             <a:ext cx="1554480" cy="822960"/>
           </a:xfrm>
           <a:prstGeom prst="rect">
@@ -12819,7 +12843,7 @@
                   <a:srgbClr val="1B1F2A"/>
                 </a:solidFill>
               </a:rPr>
-              <a:t>Month 36</a:t>
+              <a:t>Month 24</a:t>
             </a:r>
             <a:endParaRPr lang="en-US" sz="1100" dirty="0"/>
           </a:p>
@@ -12833,7 +12857,7 @@
         </p:nvSpPr>
         <p:spPr>
           <a:xfrm>
-            <a:off x="6208776" y="3026664"/>
+            <a:off x="5520482" y="3026664"/>
             <a:ext cx="164592" cy="164592"/>
           </a:xfrm>
           <a:prstGeom prst="ellipse">
@@ -12858,7 +12882,7 @@
         </p:nvSpPr>
         <p:spPr>
           <a:xfrm>
-            <a:off x="5513832" y="2103120"/>
+            <a:off x="4825538" y="2103120"/>
             <a:ext cx="1554480" cy="822960"/>
           </a:xfrm>
           <a:prstGeom prst="rect">
@@ -12894,7 +12918,7 @@
                   <a:srgbClr val="1B1F2A"/>
                 </a:solidFill>
               </a:rPr>
-              <a:t>Month 39</a:t>
+              <a:t>Month 27</a:t>
             </a:r>
             <a:endParaRPr lang="en-US" sz="1100" dirty="0"/>
           </a:p>
@@ -12908,7 +12932,7 @@
         </p:nvSpPr>
         <p:spPr>
           <a:xfrm>
-            <a:off x="8311896" y="3026664"/>
+            <a:off x="7910391" y="3026664"/>
             <a:ext cx="164592" cy="164592"/>
           </a:xfrm>
           <a:prstGeom prst="ellipse">
@@ -12933,7 +12957,7 @@
         </p:nvSpPr>
         <p:spPr>
           <a:xfrm>
-            <a:off x="7616952" y="3337560"/>
+            <a:off x="7215447" y="3337560"/>
             <a:ext cx="1554480" cy="822960"/>
           </a:xfrm>
           <a:prstGeom prst="rect">
@@ -12969,7 +12993,7 @@
                   <a:srgbClr val="1B1F2A"/>
                 </a:solidFill>
               </a:rPr>
-              <a:t>Month 54</a:t>
+              <a:t>Month 42</a:t>
             </a:r>
             <a:endParaRPr lang="en-US" sz="1100" dirty="0"/>
           </a:p>
@@ -12983,7 +13007,7 @@
         </p:nvSpPr>
         <p:spPr>
           <a:xfrm>
-            <a:off x="8732520" y="3026664"/>
+            <a:off x="8388373" y="3026664"/>
             <a:ext cx="164592" cy="164592"/>
           </a:xfrm>
           <a:prstGeom prst="ellipse">
@@ -13008,7 +13032,7 @@
         </p:nvSpPr>
         <p:spPr>
           <a:xfrm>
-            <a:off x="8037576" y="2103120"/>
+            <a:off x="7693429" y="2103120"/>
             <a:ext cx="1554480" cy="822960"/>
           </a:xfrm>
           <a:prstGeom prst="rect">
@@ -13044,7 +13068,7 @@
                   <a:srgbClr val="1B1F2A"/>
                 </a:solidFill>
               </a:rPr>
-              <a:t>Month 57</a:t>
+              <a:t>Month 45</a:t>
             </a:r>
             <a:endParaRPr lang="en-US" sz="1100" dirty="0"/>
           </a:p>
@@ -13058,7 +13082,7 @@
         </p:nvSpPr>
         <p:spPr>
           <a:xfrm>
-            <a:off x="10835640" y="3026664"/>
+            <a:off x="10778282" y="3026664"/>
             <a:ext cx="164592" cy="164592"/>
           </a:xfrm>
           <a:prstGeom prst="ellipse">
@@ -13083,7 +13107,7 @@
         </p:nvSpPr>
         <p:spPr>
           <a:xfrm>
-            <a:off x="10140696" y="3337560"/>
+            <a:off x="10083338" y="3337560"/>
             <a:ext cx="1554480" cy="822960"/>
           </a:xfrm>
           <a:prstGeom prst="rect">
@@ -13119,7 +13143,7 @@
                   <a:srgbClr val="1B1F2A"/>
                 </a:solidFill>
               </a:rPr>
-              <a:t>Month 72</a:t>
+              <a:t>Month 60</a:t>
             </a:r>
             <a:endParaRPr lang="en-US" sz="1100" dirty="0"/>
           </a:p>
@@ -13159,7 +13183,7 @@
                   <a:srgbClr val="1B1F2A"/>
                 </a:solidFill>
               </a:rPr>
-              <a:t>Funding and signing: month 12 (ticket due when the down payment of EGP 85 million falls due).</a:t>
+              <a:t>Funding and signing: month 0 (ticket due when the down payment of EGP 85 million falls due).</a:t>
             </a:r>
             <a:endParaRPr lang="en-US" sz="1300" dirty="0"/>
           </a:p>
@@ -13177,7 +13201,7 @@
                   <a:srgbClr val="1B1F2A"/>
                 </a:solidFill>
               </a:rPr>
-              <a:t>Option A: units are allocated at signing and delivered at handover (month 54); the investor may resell after consents.</a:t>
+              <a:t>Option A: units are allocated at signing and delivered at handover (month 42); the investor may resell after consents.</a:t>
             </a:r>
             <a:endParaRPr lang="en-US" sz="1300" dirty="0"/>
           </a:p>
@@ -13195,7 +13219,7 @@
                   <a:srgbClr val="1B1F2A"/>
                 </a:solidFill>
               </a:rPr>
-              <a:t>Option B: 24-month grace, then 12 quarterly instalments from month 39.</a:t>
+              <a:t>Option B: 24-month grace, then 12 quarterly instalments from month 27.</a:t>
             </a:r>
             <a:endParaRPr lang="en-US" sz="1300" dirty="0"/>
           </a:p>
@@ -13231,7 +13255,7 @@
                   <a:srgbClr val="6B7280"/>
                 </a:solidFill>
               </a:rPr>
-              <a:t>Source: Jalour financial model; Financial Annex. Months count from the start of the model timeline.</a:t>
+              <a:t>Source: Jalour financial model; Financial Annex. Months count from this project's sales launch (month 1).</a:t>
             </a:r>
             <a:endParaRPr lang="en-US" sz="900" dirty="0"/>
           </a:p>
@@ -14131,7 +14155,7 @@
                 <a:ea typeface="Cambria" pitchFamily="34" charset="-122"/>
                 <a:cs typeface="Cambria" pitchFamily="34" charset="-120"/>
               </a:rPr>
-              <a:t>Month 54</a:t>
+              <a:t>Month 42</a:t>
             </a:r>
             <a:endParaRPr lang="en-US" sz="3000" dirty="0"/>
           </a:p>
@@ -14167,7 +14191,7 @@
                   <a:srgbClr val="6B7280"/>
                 </a:solidFill>
               </a:rPr>
-              <a:t>Handover; sales from month 13, construction from month 19 for 36 months</a:t>
+              <a:t>Handover; sales from month 1, construction from month 7 for 36 months</a:t>
             </a:r>
             <a:endParaRPr lang="en-US" sz="1200" dirty="0"/>
           </a:p>
@@ -14269,7 +14293,7 @@
                   <a:srgbClr val="6B7280"/>
                 </a:solidFill>
               </a:rPr>
-              <a:t>Sales plan: 80% of units sold over the sales window, at modelled prices</a:t>
+              <a:t>Sales plan over the sales window, at modelled prices</a:t>
             </a:r>
             <a:endParaRPr lang="en-US" sz="1200" dirty="0"/>
           </a:p>
@@ -15358,7 +15382,7 @@
                             <a:srgbClr val="1B1F2A"/>
                           </a:solidFill>
                         </a:rPr>
-                        <a:t>EGP 230 million in 12 equal quarterly instalments of EGP 19.17 million; first payment month 39, last month 72</a:t>
+                        <a:t>EGP 230 million in 12 equal quarterly instalments of EGP 19.17 million; first payment month 27, last month 60</a:t>
                       </a:r>
                       <a:endParaRPr lang="en-US" sz="1300" dirty="0"/>
                     </a:p>
@@ -19181,7 +19205,7 @@
                             <a:srgbClr val="1B1F2A"/>
                           </a:solidFill>
                         </a:rPr>
-                        <a:t>Month 13</a:t>
+                        <a:t>Month 1</a:t>
                       </a:r>
                       <a:endParaRPr lang="en-US" sz="1400" dirty="0"/>
                     </a:p>
@@ -19305,7 +19329,7 @@
                             <a:srgbClr val="1B1F2A"/>
                           </a:solidFill>
                         </a:rPr>
-                        <a:t>Month 19 to 54 (36 months)</a:t>
+                        <a:t>Month 7 to 42 (36 months)</a:t>
                       </a:r>
                       <a:endParaRPr lang="en-US" sz="1400" dirty="0"/>
                     </a:p>
@@ -19429,7 +19453,7 @@
                             <a:srgbClr val="1B1F2A"/>
                           </a:solidFill>
                         </a:rPr>
-                        <a:t>Month 54</a:t>
+                        <a:t>Month 42</a:t>
                       </a:r>
                       <a:endParaRPr lang="en-US" sz="1400" dirty="0"/>
                     </a:p>
@@ -19527,7 +19551,7 @@
                   <a:srgbClr val="6B7280"/>
                 </a:solidFill>
               </a:rPr>
-              <a:t>Source: Jalour financial model (project summary). Jalour retains 20% of units, outside the sales plan and outside this offering.</a:t>
+              <a:t>Source: Jalour financial model (project summary).</a:t>
             </a:r>
             <a:endParaRPr lang="en-US" sz="900" dirty="0"/>
           </a:p>
@@ -21382,7 +21406,7 @@
                   <a:srgbClr val="1B1F2A"/>
                 </a:solidFill>
               </a:rPr>
-              <a:t>Total sales at 100% of units: EGP 3,342 million; plan sells 80%: EGP 2,674 million.</a:t>
+              <a:t>Sales plan: EGP 2,674 million at modelled prices; the landlord share is calculated on the full project sales value of EGP 3,342 million.</a:t>
             </a:r>
             <a:endParaRPr lang="en-US" sz="1200" dirty="0"/>
           </a:p>
